--- a/pictures.pptx
+++ b/pictures.pptx
@@ -282,7 +282,7 @@
           <a:p>
             <a:fld id="{65BDA79E-ECE0-4F78-BA93-E393AD04CE65}" type="datetimeFigureOut">
               <a:rPr lang="fr-CA" smtClean="0"/>
-              <a:t>2026-08-03</a:t>
+              <a:t>2026-09-16</a:t>
             </a:fld>
             <a:endParaRPr lang="fr-CA"/>
           </a:p>
@@ -452,7 +452,7 @@
           <a:p>
             <a:fld id="{65BDA79E-ECE0-4F78-BA93-E393AD04CE65}" type="datetimeFigureOut">
               <a:rPr lang="fr-CA" smtClean="0"/>
-              <a:t>2026-08-03</a:t>
+              <a:t>2026-09-16</a:t>
             </a:fld>
             <a:endParaRPr lang="fr-CA"/>
           </a:p>
@@ -632,7 +632,7 @@
           <a:p>
             <a:fld id="{65BDA79E-ECE0-4F78-BA93-E393AD04CE65}" type="datetimeFigureOut">
               <a:rPr lang="fr-CA" smtClean="0"/>
-              <a:t>2026-08-03</a:t>
+              <a:t>2026-09-16</a:t>
             </a:fld>
             <a:endParaRPr lang="fr-CA"/>
           </a:p>
@@ -802,7 +802,7 @@
           <a:p>
             <a:fld id="{65BDA79E-ECE0-4F78-BA93-E393AD04CE65}" type="datetimeFigureOut">
               <a:rPr lang="fr-CA" smtClean="0"/>
-              <a:t>2026-08-03</a:t>
+              <a:t>2026-09-16</a:t>
             </a:fld>
             <a:endParaRPr lang="fr-CA"/>
           </a:p>
@@ -1048,7 +1048,7 @@
           <a:p>
             <a:fld id="{65BDA79E-ECE0-4F78-BA93-E393AD04CE65}" type="datetimeFigureOut">
               <a:rPr lang="fr-CA" smtClean="0"/>
-              <a:t>2026-08-03</a:t>
+              <a:t>2026-09-16</a:t>
             </a:fld>
             <a:endParaRPr lang="fr-CA"/>
           </a:p>
@@ -1280,7 +1280,7 @@
           <a:p>
             <a:fld id="{65BDA79E-ECE0-4F78-BA93-E393AD04CE65}" type="datetimeFigureOut">
               <a:rPr lang="fr-CA" smtClean="0"/>
-              <a:t>2026-08-03</a:t>
+              <a:t>2026-09-16</a:t>
             </a:fld>
             <a:endParaRPr lang="fr-CA"/>
           </a:p>
@@ -1647,7 +1647,7 @@
           <a:p>
             <a:fld id="{65BDA79E-ECE0-4F78-BA93-E393AD04CE65}" type="datetimeFigureOut">
               <a:rPr lang="fr-CA" smtClean="0"/>
-              <a:t>2026-08-03</a:t>
+              <a:t>2026-09-16</a:t>
             </a:fld>
             <a:endParaRPr lang="fr-CA"/>
           </a:p>
@@ -1765,7 +1765,7 @@
           <a:p>
             <a:fld id="{65BDA79E-ECE0-4F78-BA93-E393AD04CE65}" type="datetimeFigureOut">
               <a:rPr lang="fr-CA" smtClean="0"/>
-              <a:t>2026-08-03</a:t>
+              <a:t>2026-09-16</a:t>
             </a:fld>
             <a:endParaRPr lang="fr-CA"/>
           </a:p>
@@ -1860,7 +1860,7 @@
           <a:p>
             <a:fld id="{65BDA79E-ECE0-4F78-BA93-E393AD04CE65}" type="datetimeFigureOut">
               <a:rPr lang="fr-CA" smtClean="0"/>
-              <a:t>2026-08-03</a:t>
+              <a:t>2026-09-16</a:t>
             </a:fld>
             <a:endParaRPr lang="fr-CA"/>
           </a:p>
@@ -2137,7 +2137,7 @@
           <a:p>
             <a:fld id="{65BDA79E-ECE0-4F78-BA93-E393AD04CE65}" type="datetimeFigureOut">
               <a:rPr lang="fr-CA" smtClean="0"/>
-              <a:t>2026-08-03</a:t>
+              <a:t>2026-09-16</a:t>
             </a:fld>
             <a:endParaRPr lang="fr-CA"/>
           </a:p>
@@ -2394,7 +2394,7 @@
           <a:p>
             <a:fld id="{65BDA79E-ECE0-4F78-BA93-E393AD04CE65}" type="datetimeFigureOut">
               <a:rPr lang="fr-CA" smtClean="0"/>
-              <a:t>2026-08-03</a:t>
+              <a:t>2026-09-16</a:t>
             </a:fld>
             <a:endParaRPr lang="fr-CA"/>
           </a:p>
@@ -2607,7 +2607,7 @@
           <a:p>
             <a:fld id="{65BDA79E-ECE0-4F78-BA93-E393AD04CE65}" type="datetimeFigureOut">
               <a:rPr lang="fr-CA" smtClean="0"/>
-              <a:t>2026-08-03</a:t>
+              <a:t>2026-09-16</a:t>
             </a:fld>
             <a:endParaRPr lang="fr-CA"/>
           </a:p>
@@ -3372,10 +3372,10 @@
       </p:pic>
       <p:pic>
         <p:nvPicPr>
-          <p:cNvPr id="4" name="Image 3">
+          <p:cNvPr id="3" name="Image 2">
             <a:extLst>
               <a:ext uri="{FF2B5EF4-FFF2-40B4-BE49-F238E27FC236}">
-                <a16:creationId xmlns:a16="http://schemas.microsoft.com/office/drawing/2014/main" id="{42E473BF-73D2-3CD8-885F-A26DD72AA7C4}"/>
+                <a16:creationId xmlns:a16="http://schemas.microsoft.com/office/drawing/2014/main" id="{0FE3BE92-4201-6492-E45C-7165CD46275E}"/>
               </a:ext>
             </a:extLst>
           </p:cNvPr>
@@ -3385,22 +3385,15 @@
           <p:nvPr/>
         </p:nvPicPr>
         <p:blipFill>
-          <a:blip r:embed="rId3">
-            <a:extLst>
-              <a:ext uri="{28A0092B-C50C-407E-A947-70E740481C1C}">
-                <a14:useLocalDpi xmlns:a14="http://schemas.microsoft.com/office/drawing/2010/main" val="0"/>
-              </a:ext>
-            </a:extLst>
-          </a:blip>
-          <a:srcRect t="3366" b="2992"/>
+          <a:blip r:embed="rId3"/>
           <a:stretch>
             <a:fillRect/>
           </a:stretch>
         </p:blipFill>
         <p:spPr>
           <a:xfrm>
-            <a:off x="3857820" y="1327883"/>
-            <a:ext cx="4476359" cy="4202234"/>
+            <a:off x="2739099" y="1459059"/>
+            <a:ext cx="6713802" cy="3939881"/>
           </a:xfrm>
           <a:prstGeom prst="rect">
             <a:avLst/>
